--- a/Graduation Project Documentation/Marketly Graduation Presentation.pptx
+++ b/Graduation Project Documentation/Marketly Graduation Presentation.pptx
@@ -813,7 +813,7 @@
               </a:spcAft>
               <a:buNone/>
             </a:pPr>
-            <a:endParaRPr/>
+            <a:endParaRPr dirty="0"/>
           </a:p>
         </p:txBody>
       </p:sp>
@@ -12927,6 +12927,112 @@
           </a:p>
         </p:txBody>
       </p:sp>
+      <p:pic>
+        <p:nvPicPr>
+          <p:cNvPr id="4" name="Picture 3">
+            <a:extLst>
+              <a:ext uri="{FF2B5EF4-FFF2-40B4-BE49-F238E27FC236}">
+                <a16:creationId xmlns:a16="http://schemas.microsoft.com/office/drawing/2014/main" id="{71A4541A-C35D-433C-843D-FDC2E1F0A827}"/>
+              </a:ext>
+            </a:extLst>
+          </p:cNvPr>
+          <p:cNvPicPr>
+            <a:picLocks noChangeAspect="1"/>
+          </p:cNvPicPr>
+          <p:nvPr/>
+        </p:nvPicPr>
+        <p:blipFill>
+          <a:blip r:embed="rId5"/>
+          <a:srcRect/>
+          <a:stretch/>
+        </p:blipFill>
+        <p:spPr>
+          <a:xfrm>
+            <a:off x="1" y="0"/>
+            <a:ext cx="1027029" cy="1022465"/>
+          </a:xfrm>
+          <a:prstGeom prst="roundRect">
+            <a:avLst>
+              <a:gd name="adj" fmla="val 16667"/>
+            </a:avLst>
+          </a:prstGeom>
+          <a:ln>
+            <a:noFill/>
+          </a:ln>
+          <a:effectLst>
+            <a:outerShdw blurRad="76200" dist="38100" dir="7800000" algn="tl" rotWithShape="0">
+              <a:srgbClr val="000000">
+                <a:alpha val="40000"/>
+              </a:srgbClr>
+            </a:outerShdw>
+          </a:effectLst>
+          <a:scene3d>
+            <a:camera prst="orthographicFront"/>
+            <a:lightRig rig="contrasting" dir="t">
+              <a:rot lat="0" lon="0" rev="4200000"/>
+            </a:lightRig>
+          </a:scene3d>
+          <a:sp3d prstMaterial="plastic">
+            <a:bevelT w="381000" h="114300" prst="relaxedInset"/>
+            <a:contourClr>
+              <a:srgbClr val="969696"/>
+            </a:contourClr>
+          </a:sp3d>
+        </p:spPr>
+      </p:pic>
+      <p:pic>
+        <p:nvPicPr>
+          <p:cNvPr id="11" name="Picture 10">
+            <a:extLst>
+              <a:ext uri="{FF2B5EF4-FFF2-40B4-BE49-F238E27FC236}">
+                <a16:creationId xmlns:a16="http://schemas.microsoft.com/office/drawing/2014/main" id="{B7979ECE-0190-43C7-A075-0C6766609120}"/>
+              </a:ext>
+            </a:extLst>
+          </p:cNvPr>
+          <p:cNvPicPr>
+            <a:picLocks noChangeAspect="1"/>
+          </p:cNvPicPr>
+          <p:nvPr/>
+        </p:nvPicPr>
+        <p:blipFill>
+          <a:blip r:embed="rId6"/>
+          <a:srcRect/>
+          <a:stretch/>
+        </p:blipFill>
+        <p:spPr>
+          <a:xfrm>
+            <a:off x="11167251" y="0"/>
+            <a:ext cx="1022465" cy="1022465"/>
+          </a:xfrm>
+          <a:prstGeom prst="roundRect">
+            <a:avLst>
+              <a:gd name="adj" fmla="val 16667"/>
+            </a:avLst>
+          </a:prstGeom>
+          <a:ln>
+            <a:noFill/>
+          </a:ln>
+          <a:effectLst>
+            <a:outerShdw blurRad="76200" dist="38100" dir="7800000" algn="tl" rotWithShape="0">
+              <a:srgbClr val="000000">
+                <a:alpha val="40000"/>
+              </a:srgbClr>
+            </a:outerShdw>
+          </a:effectLst>
+          <a:scene3d>
+            <a:camera prst="orthographicFront"/>
+            <a:lightRig rig="contrasting" dir="t">
+              <a:rot lat="0" lon="0" rev="4200000"/>
+            </a:lightRig>
+          </a:scene3d>
+          <a:sp3d prstMaterial="plastic">
+            <a:bevelT w="381000" h="114300" prst="relaxedInset"/>
+            <a:contourClr>
+              <a:srgbClr val="969696"/>
+            </a:contourClr>
+          </a:sp3d>
+        </p:spPr>
+      </p:pic>
     </p:spTree>
   </p:cSld>
   <p:clrMapOvr>

--- a/Graduation Project Documentation/Marketly Graduation Presentation.pptx
+++ b/Graduation Project Documentation/Marketly Graduation Presentation.pptx
@@ -5000,7 +5000,7 @@
                 <a:ea typeface="Calibri" pitchFamily="34" charset="-122"/>
                 <a:cs typeface="Calibri" pitchFamily="34" charset="-120"/>
               </a:rPr>
-              <a:t>Front Developer</a:t>
+              <a:t>Frontend Developer</a:t>
             </a:r>
             <a:endParaRPr lang="en-US" sz="1000" dirty="0"/>
           </a:p>
@@ -5178,7 +5178,7 @@
                 <a:ea typeface="Calibri" pitchFamily="34" charset="-122"/>
                 <a:cs typeface="Calibri" pitchFamily="34" charset="-120"/>
               </a:rPr>
-              <a:t>Front Developer</a:t>
+              <a:t>Frontend Developer</a:t>
             </a:r>
             <a:endParaRPr lang="en-US" sz="1000" dirty="0"/>
           </a:p>
